--- a/Технічний супровід Документація (лаб 3)/AI Plagiarism Checker.pptx
+++ b/Технічний супровід Документація (лаб 3)/AI Plagiarism Checker.pptx
@@ -109,6 +109,11 @@
       </a:defRPr>
     </a:lvl9pPr>
   </p:defaultTextStyle>
+  <p:extLst>
+    <p:ext uri="{EFAFB233-063F-42B5-8137-9DF3F51BA10A}">
+      <p15:sldGuideLst xmlns:p15="http://schemas.microsoft.com/office/powerpoint/2012/main"/>
+    </p:ext>
+  </p:extLst>
 </p:presentation>
 </file>
 
@@ -7815,6 +7820,10 @@
               <a:rPr lang="ru-RU" dirty="0" err="1" smtClean="0"/>
               <a:t>GitHub-репозиторій</a:t>
             </a:r>
+            <a:r>
+              <a:rPr lang="en-US" dirty="0"/>
+              <a:t> https://github.com/Roman05044/module_2</a:t>
+            </a:r>
             <a:endParaRPr lang="uk-UA" dirty="0"/>
           </a:p>
         </p:txBody>
